--- a/dist/초1/수학/수와연산/초1_수학_수와연산_08_세수의덧셈과뺄셈.pptx
+++ b/dist/초1/수학/수와연산/초1_수학_수와연산_08_세수의덧셈과뺄셈.pptx
@@ -120,13 +120,13 @@
   <p:extLst>
     <p:ext uri="{521415D9-36F7-43E2-AB2F-B90AF26B5E84}">
       <p14:sectionLst xmlns:p14="http://schemas.microsoft.com/office/powerpoint/2010/main">
-        <p14:section name="도입" id="{2caa7ab9-e98f-1a43-45b4-baae033425f0}">
+        <p14:section name="도입" id="{b38d9f3e-2d38-d16b-b853-7e1ca254343a}">
           <p14:sldIdLst>
             <p14:sldId id="256"/>
             <p14:sldId id="257"/>
           </p14:sldIdLst>
         </p14:section>
-        <p14:section name="개념" id="{e6b838f0-2da5-58d4-ed4d-fb0df60f4111}">
+        <p14:section name="개념" id="{6fa7db37-d4f2-a61c-bfe1-313fd9036d5b}">
           <p14:sldIdLst>
             <p14:sldId id="258"/>
             <p14:sldId id="259"/>
@@ -134,26 +134,26 @@
             <p14:sldId id="261"/>
           </p14:sldIdLst>
         </p14:section>
-        <p14:section name="연습" id="{77a3c3f5-d6fb-5812-ebad-0dbd64888bb7}">
+        <p14:section name="연습" id="{7ee744fb-00a5-bcdf-3a1d-1c2115349249}">
           <p14:sldIdLst>
             <p14:sldId id="262"/>
             <p14:sldId id="263"/>
             <p14:sldId id="264"/>
           </p14:sldIdLst>
         </p14:section>
-        <p14:section name="확인" id="{72c8b4cd-b676-3a6d-0421-5e566fe6c383}">
+        <p14:section name="확인" id="{82f7c905-1554-c3bb-2e04-520a720684c8}">
           <p14:sldIdLst>
             <p14:sldId id="265"/>
             <p14:sldId id="266"/>
             <p14:sldId id="267"/>
           </p14:sldIdLst>
         </p14:section>
-        <p14:section name="정리" id="{7717cd42-0066-6684-1dfe-fde656593c26}">
+        <p14:section name="정리" id="{ef08a26e-b823-e4be-f30a-810552500598}">
           <p14:sldIdLst>
             <p14:sldId id="268"/>
           </p14:sldIdLst>
         </p14:section>
-        <p14:section name="보충" id="{da69c372-2d82-4d29-130e-32ca1e9c1296}">
+        <p14:section name="보충" id="{4c0f73e7-5ed7-71df-9e46-dd06863c9de1}">
           <p14:sldIdLst>
             <p14:sldId id="269"/>
           </p14:sldIdLst>

--- a/dist/초1/수학/수와연산/초1_수학_수와연산_08_세수의덧셈과뺄셈.pptx
+++ b/dist/초1/수학/수와연산/초1_수학_수와연산_08_세수의덧셈과뺄셈.pptx
@@ -120,13 +120,13 @@
   <p:extLst>
     <p:ext uri="{521415D9-36F7-43E2-AB2F-B90AF26B5E84}">
       <p14:sectionLst xmlns:p14="http://schemas.microsoft.com/office/powerpoint/2010/main">
-        <p14:section name="도입" id="{b38d9f3e-2d38-d16b-b853-7e1ca254343a}">
+        <p14:section name="도입" id="{0936347f-3548-c935-69a8-c1a9c7f23690}">
           <p14:sldIdLst>
             <p14:sldId id="256"/>
             <p14:sldId id="257"/>
           </p14:sldIdLst>
         </p14:section>
-        <p14:section name="개념" id="{6fa7db37-d4f2-a61c-bfe1-313fd9036d5b}">
+        <p14:section name="개념" id="{270cf911-66be-4f45-b8cb-5c065976394c}">
           <p14:sldIdLst>
             <p14:sldId id="258"/>
             <p14:sldId id="259"/>
@@ -134,26 +134,26 @@
             <p14:sldId id="261"/>
           </p14:sldIdLst>
         </p14:section>
-        <p14:section name="연습" id="{7ee744fb-00a5-bcdf-3a1d-1c2115349249}">
+        <p14:section name="연습" id="{9f9d3f52-9d97-6bbe-411a-25a7a19d4e61}">
           <p14:sldIdLst>
             <p14:sldId id="262"/>
             <p14:sldId id="263"/>
             <p14:sldId id="264"/>
           </p14:sldIdLst>
         </p14:section>
-        <p14:section name="확인" id="{82f7c905-1554-c3bb-2e04-520a720684c8}">
+        <p14:section name="확인" id="{7feff849-70e1-7c18-c4f0-6f78e4628584}">
           <p14:sldIdLst>
             <p14:sldId id="265"/>
             <p14:sldId id="266"/>
             <p14:sldId id="267"/>
           </p14:sldIdLst>
         </p14:section>
-        <p14:section name="정리" id="{ef08a26e-b823-e4be-f30a-810552500598}">
+        <p14:section name="정리" id="{e89bb0f4-6a19-5de9-8ef2-9484c7159592}">
           <p14:sldIdLst>
             <p14:sldId id="268"/>
           </p14:sldIdLst>
         </p14:section>
-        <p14:section name="보충" id="{4c0f73e7-5ed7-71df-9e46-dd06863c9de1}">
+        <p14:section name="보충" id="{040367b3-b8f9-e6de-5634-0de2e8f3c594}">
           <p14:sldIdLst>
             <p14:sldId id="269"/>
           </p14:sldIdLst>

--- a/dist/초1/수학/수와연산/초1_수학_수와연산_08_세수의덧셈과뺄셈.pptx
+++ b/dist/초1/수학/수와연산/초1_수학_수와연산_08_세수의덧셈과뺄셈.pptx
@@ -120,13 +120,13 @@
   <p:extLst>
     <p:ext uri="{521415D9-36F7-43E2-AB2F-B90AF26B5E84}">
       <p14:sectionLst xmlns:p14="http://schemas.microsoft.com/office/powerpoint/2010/main">
-        <p14:section name="도입" id="{0936347f-3548-c935-69a8-c1a9c7f23690}">
+        <p14:section name="도입" id="{931f9d57-e59d-c794-d36f-94bf0744bc5e}">
           <p14:sldIdLst>
             <p14:sldId id="256"/>
             <p14:sldId id="257"/>
           </p14:sldIdLst>
         </p14:section>
-        <p14:section name="개념" id="{270cf911-66be-4f45-b8cb-5c065976394c}">
+        <p14:section name="개념" id="{0d361756-46d4-3667-e63e-c0f9943dd0cc}">
           <p14:sldIdLst>
             <p14:sldId id="258"/>
             <p14:sldId id="259"/>
@@ -134,26 +134,26 @@
             <p14:sldId id="261"/>
           </p14:sldIdLst>
         </p14:section>
-        <p14:section name="연습" id="{9f9d3f52-9d97-6bbe-411a-25a7a19d4e61}">
+        <p14:section name="연습" id="{f6371990-4e15-1248-2e9a-c719fd896eb0}">
           <p14:sldIdLst>
             <p14:sldId id="262"/>
             <p14:sldId id="263"/>
             <p14:sldId id="264"/>
           </p14:sldIdLst>
         </p14:section>
-        <p14:section name="확인" id="{7feff849-70e1-7c18-c4f0-6f78e4628584}">
+        <p14:section name="확인" id="{b0a24fd2-d933-7e67-3b24-78a75a0de504}">
           <p14:sldIdLst>
             <p14:sldId id="265"/>
             <p14:sldId id="266"/>
             <p14:sldId id="267"/>
           </p14:sldIdLst>
         </p14:section>
-        <p14:section name="정리" id="{e89bb0f4-6a19-5de9-8ef2-9484c7159592}">
+        <p14:section name="정리" id="{36905f21-640c-b5aa-0edf-558e39358df9}">
           <p14:sldIdLst>
             <p14:sldId id="268"/>
           </p14:sldIdLst>
         </p14:section>
-        <p14:section name="보충" id="{040367b3-b8f9-e6de-5634-0de2e8f3c594}">
+        <p14:section name="보충" id="{2bd95992-277c-26fd-61e9-28ac0ef4a02a}">
           <p14:sldIdLst>
             <p14:sldId id="269"/>
           </p14:sldIdLst>
